--- a/lecons/USA/Settlement Geography/24_USA_SET_L22_Controlling_Town_Spread.pptx
+++ b/lecons/USA/Settlement Geography/24_USA_SET_L22_Controlling_Town_Spread.pptx
@@ -4251,7 +4251,7 @@
           <a:p>
             <a:r>
               <a:rPr lang="en-US" dirty="0"/>
-              <a:t>For your homework: Propose three measures to control the spread of Yaoundé or Douala. We shall correct it at the beginning of our next lesson.</a:t>
+              <a:t>For your homework: List three natural resources found in Cameroon. We shall correct it at the beginning of our next lesson.</a:t>
             </a:r>
             <a:endParaRPr lang="en-US" dirty="0"/>
           </a:p>
@@ -4339,7 +4339,7 @@
           <a:p>
             <a:r>
               <a:rPr lang="en-US" dirty="0"/>
-              <a:t>Our next lesson will be on Further Study 1: Urbanisation in Cameroon. Thank you for your attention, and see you next time.</a:t>
+              <a:t>Our next lesson will be on Lesson 1: Natural Resources. Thank you for your attention, and see you next time.</a:t>
             </a:r>
             <a:endParaRPr lang="en-US" dirty="0"/>
           </a:p>
@@ -17083,7 +17083,7 @@
                 <a:ea typeface="Times New Roman" pitchFamily="34" charset="-122"/>
                 <a:cs typeface="Times New Roman" pitchFamily="34" charset="-120"/>
               </a:rPr>
-              <a:t>Propose three measures to control the spread of Yaoundé or Douala.</a:t>
+              <a:t>List three natural resources found in Cameroon.</a:t>
             </a:r>
             <a:endParaRPr lang="en-US" sz="4000" dirty="0"/>
           </a:p>
@@ -17322,7 +17322,7 @@
                 <a:ea typeface="Times New Roman" pitchFamily="34" charset="-122"/>
                 <a:cs typeface="Times New Roman" pitchFamily="34" charset="-120"/>
               </a:rPr>
-              <a:t>Further Study 1: Urbanisation in Cameroon</a:t>
+              <a:t>Lesson 1: Natural Resources</a:t>
             </a:r>
             <a:endParaRPr lang="en-US" sz="4000" dirty="0"/>
           </a:p>
@@ -19966,7 +19966,7 @@
                           <a:ea typeface="Calibri" pitchFamily="34" charset="-122"/>
                           <a:cs typeface="Calibri" pitchFamily="34" charset="-120"/>
                         </a:rPr>
-                        <a:t>Propose three measures to control the spread of Yaoundé or Douala.</a:t>
+                        <a:t>List three natural resources found in Cameroon.</a:t>
                       </a:r>
                       <a:endParaRPr lang="en-US" sz="1600" dirty="0">
                         <a:latin typeface="Calibri" charset="0"/>
